--- a/activity/M03A04/M03A04.pptx
+++ b/activity/M03A04/M03A04.pptx
@@ -268,22 +268,6 @@
     </pc:docChg>
   </pc:docChgLst>
   <pc:docChgLst>
-    <pc:chgData name="WILLIAM RICARDO AGUILAR PIÑA" userId="25538c52-b196-49fc-9025-2dd86a54f18a" providerId="ADAL" clId="{E62A114D-19B6-45A0-8C8C-320F0B491F40}"/>
-    <pc:docChg chg="modSld">
-      <pc:chgData name="WILLIAM RICARDO AGUILAR PIÑA" userId="25538c52-b196-49fc-9025-2dd86a54f18a" providerId="ADAL" clId="{E62A114D-19B6-45A0-8C8C-320F0B491F40}" dt="2018-06-29T15:35:42.597" v="16" actId="20577"/>
-      <pc:docMkLst>
-        <pc:docMk/>
-      </pc:docMkLst>
-      <pc:sldChg chg="modSp">
-        <pc:chgData name="WILLIAM RICARDO AGUILAR PIÑA" userId="25538c52-b196-49fc-9025-2dd86a54f18a" providerId="ADAL" clId="{E62A114D-19B6-45A0-8C8C-320F0B491F40}" dt="2018-06-29T15:35:42.597" v="16" actId="20577"/>
-        <pc:sldMkLst>
-          <pc:docMk/>
-          <pc:sldMk cId="0" sldId="256"/>
-        </pc:sldMkLst>
-      </pc:sldChg>
-    </pc:docChg>
-  </pc:docChgLst>
-  <pc:docChgLst>
     <pc:chgData name="WILLIAM RICARDO AGUILAR PIÑA" userId="25538c52-b196-49fc-9025-2dd86a54f18a" providerId="ADAL" clId="{47FD5ED3-56AA-42A1-A85A-B27B53CD4909}"/>
     <pc:docChg chg="modSld">
       <pc:chgData name="WILLIAM RICARDO AGUILAR PIÑA" userId="25538c52-b196-49fc-9025-2dd86a54f18a" providerId="ADAL" clId="{47FD5ED3-56AA-42A1-A85A-B27B53CD4909}" dt="2022-10-25T21:05:46.444" v="29" actId="20577"/>
@@ -354,6 +338,22 @@
       </pc:sldChg>
     </pc:docChg>
   </pc:docChgLst>
+  <pc:docChgLst>
+    <pc:chgData name="WILLIAM RICARDO AGUILAR PIÑA" userId="25538c52-b196-49fc-9025-2dd86a54f18a" providerId="ADAL" clId="{E62A114D-19B6-45A0-8C8C-320F0B491F40}"/>
+    <pc:docChg chg="modSld">
+      <pc:chgData name="WILLIAM RICARDO AGUILAR PIÑA" userId="25538c52-b196-49fc-9025-2dd86a54f18a" providerId="ADAL" clId="{E62A114D-19B6-45A0-8C8C-320F0B491F40}" dt="2018-06-29T15:35:42.597" v="16" actId="20577"/>
+      <pc:docMkLst>
+        <pc:docMk/>
+      </pc:docMkLst>
+      <pc:sldChg chg="modSp">
+        <pc:chgData name="WILLIAM RICARDO AGUILAR PIÑA" userId="25538c52-b196-49fc-9025-2dd86a54f18a" providerId="ADAL" clId="{E62A114D-19B6-45A0-8C8C-320F0B491F40}" dt="2018-06-29T15:35:42.597" v="16" actId="20577"/>
+        <pc:sldMkLst>
+          <pc:docMk/>
+          <pc:sldMk cId="0" sldId="256"/>
+        </pc:sldMkLst>
+      </pc:sldChg>
+    </pc:docChg>
+  </pc:docChgLst>
 </pc:chgInfo>
 </file>
 
@@ -440,7 +440,7 @@
             <a:fld id="{53CE91DE-ABC6-4D22-89A0-1765B629FB43}" type="datetimeFigureOut">
               <a:rPr lang="es-CO" smtClean="0"/>
               <a:pPr/>
-              <a:t>16/11/2024</a:t>
+              <a:t>1/08/2025</a:t>
             </a:fld>
             <a:endParaRPr lang="es-CO"/>
           </a:p>
@@ -1076,7 +1076,7 @@
             <a:fld id="{43DF08CB-A55A-40B1-AEFD-F19B3CFD19B5}" type="datetimeFigureOut">
               <a:rPr lang="es-CO" smtClean="0"/>
               <a:pPr/>
-              <a:t>16/11/2024</a:t>
+              <a:t>1/08/2025</a:t>
             </a:fld>
             <a:endParaRPr lang="es-CO"/>
           </a:p>
@@ -1243,7 +1243,7 @@
             <a:fld id="{43DF08CB-A55A-40B1-AEFD-F19B3CFD19B5}" type="datetimeFigureOut">
               <a:rPr lang="es-CO" smtClean="0"/>
               <a:pPr/>
-              <a:t>16/11/2024</a:t>
+              <a:t>1/08/2025</a:t>
             </a:fld>
             <a:endParaRPr lang="es-CO"/>
           </a:p>
@@ -1420,7 +1420,7 @@
             <a:fld id="{43DF08CB-A55A-40B1-AEFD-F19B3CFD19B5}" type="datetimeFigureOut">
               <a:rPr lang="es-CO" smtClean="0"/>
               <a:pPr/>
-              <a:t>16/11/2024</a:t>
+              <a:t>1/08/2025</a:t>
             </a:fld>
             <a:endParaRPr lang="es-CO"/>
           </a:p>
@@ -1587,7 +1587,7 @@
             <a:fld id="{43DF08CB-A55A-40B1-AEFD-F19B3CFD19B5}" type="datetimeFigureOut">
               <a:rPr lang="es-CO" smtClean="0"/>
               <a:pPr/>
-              <a:t>16/11/2024</a:t>
+              <a:t>1/08/2025</a:t>
             </a:fld>
             <a:endParaRPr lang="es-CO"/>
           </a:p>
@@ -1830,7 +1830,7 @@
             <a:fld id="{43DF08CB-A55A-40B1-AEFD-F19B3CFD19B5}" type="datetimeFigureOut">
               <a:rPr lang="es-CO" smtClean="0"/>
               <a:pPr/>
-              <a:t>16/11/2024</a:t>
+              <a:t>1/08/2025</a:t>
             </a:fld>
             <a:endParaRPr lang="es-CO"/>
           </a:p>
@@ -2115,7 +2115,7 @@
             <a:fld id="{43DF08CB-A55A-40B1-AEFD-F19B3CFD19B5}" type="datetimeFigureOut">
               <a:rPr lang="es-CO" smtClean="0"/>
               <a:pPr/>
-              <a:t>16/11/2024</a:t>
+              <a:t>1/08/2025</a:t>
             </a:fld>
             <a:endParaRPr lang="es-CO"/>
           </a:p>
@@ -2534,7 +2534,7 @@
             <a:fld id="{43DF08CB-A55A-40B1-AEFD-F19B3CFD19B5}" type="datetimeFigureOut">
               <a:rPr lang="es-CO" smtClean="0"/>
               <a:pPr/>
-              <a:t>16/11/2024</a:t>
+              <a:t>1/08/2025</a:t>
             </a:fld>
             <a:endParaRPr lang="es-CO"/>
           </a:p>
@@ -2649,7 +2649,7 @@
             <a:fld id="{43DF08CB-A55A-40B1-AEFD-F19B3CFD19B5}" type="datetimeFigureOut">
               <a:rPr lang="es-CO" smtClean="0"/>
               <a:pPr/>
-              <a:t>16/11/2024</a:t>
+              <a:t>1/08/2025</a:t>
             </a:fld>
             <a:endParaRPr lang="es-CO"/>
           </a:p>
@@ -2741,7 +2741,7 @@
             <a:fld id="{43DF08CB-A55A-40B1-AEFD-F19B3CFD19B5}" type="datetimeFigureOut">
               <a:rPr lang="es-CO" smtClean="0"/>
               <a:pPr/>
-              <a:t>16/11/2024</a:t>
+              <a:t>1/08/2025</a:t>
             </a:fld>
             <a:endParaRPr lang="es-CO"/>
           </a:p>
@@ -3015,7 +3015,7 @@
             <a:fld id="{43DF08CB-A55A-40B1-AEFD-F19B3CFD19B5}" type="datetimeFigureOut">
               <a:rPr lang="es-CO" smtClean="0"/>
               <a:pPr/>
-              <a:t>16/11/2024</a:t>
+              <a:t>1/08/2025</a:t>
             </a:fld>
             <a:endParaRPr lang="es-CO"/>
           </a:p>
@@ -3265,7 +3265,7 @@
             <a:fld id="{43DF08CB-A55A-40B1-AEFD-F19B3CFD19B5}" type="datetimeFigureOut">
               <a:rPr lang="es-CO" smtClean="0"/>
               <a:pPr/>
-              <a:t>16/11/2024</a:t>
+              <a:t>1/08/2025</a:t>
             </a:fld>
             <a:endParaRPr lang="es-CO"/>
           </a:p>
@@ -3478,7 +3478,7 @@
             <a:fld id="{43DF08CB-A55A-40B1-AEFD-F19B3CFD19B5}" type="datetimeFigureOut">
               <a:rPr lang="es-CO" smtClean="0"/>
               <a:pPr/>
-              <a:t>16/11/2024</a:t>
+              <a:t>1/08/2025</a:t>
             </a:fld>
             <a:endParaRPr lang="es-CO"/>
           </a:p>
@@ -4501,7 +4501,7 @@
                 <a:latin typeface="Segoe UI Light" panose="020B0502040204020203" pitchFamily="34" charset="0"/>
                 <a:cs typeface="Segoe UI Light" panose="020B0502040204020203" pitchFamily="34" charset="0"/>
               </a:rPr>
-              <a:t>Abra el editor de geometría y guarde la geometría con el nombre HECRAS_v2a</a:t>
+              <a:t>Abra el editor de geometría y guarde la geometría con el nombre HECRAS_v1a</a:t>
             </a:r>
           </a:p>
         </p:txBody>
@@ -5129,7 +5129,7 @@
                 <a:latin typeface="Segoe UI Light" panose="020B0502040204020203" pitchFamily="34" charset="0"/>
                 <a:cs typeface="Segoe UI Light" panose="020B0502040204020203" pitchFamily="34" charset="0"/>
               </a:rPr>
-              <a:t>Para simplificar la ejecución del modelo en condiciones de Flujo No Permanente, desde el editor de geometría modifique HECRAS_v2a y elimine el tramo correspondiente al cauce lateral, luego elimine el Junction1 y por último elimine las secciones del tramo natural aguas abajo hasta la abscisa 3253.451m. </a:t>
+              <a:t>Para simplificar la ejecución del modelo en condiciones de Flujo No Permanente, desde el editor de geometría modifique HECRAS_v1a y elimine el tramo correspondiente al cauce lateral, luego elimine el Junction1 y por último elimine las secciones del tramo natural aguas abajo hasta la abscisa 3253.451m. </a:t>
             </a:r>
           </a:p>
           <a:p>
@@ -5894,7 +5894,7 @@
                 <a:latin typeface="Segoe UI Light" panose="020B0502040204020203" pitchFamily="34" charset="0"/>
                 <a:cs typeface="Segoe UI Light" panose="020B0502040204020203" pitchFamily="34" charset="0"/>
               </a:rPr>
-              <a:t>Desde la ventana de Ejecución, ejecute el modelo HECRAS_v2_NP2.33 seleccionando la geometría HECRAS_v2a (Geometría modificada solo con el tramo principal diseñado y secciones naturales de inicio y entrega).</a:t>
+              <a:t>Desde la ventana de Ejecución, ejecute el modelo HECRAS_v1_NP2.33 seleccionando la geometría HECRAS_v1a (Geometría modificada solo con el tramo principal diseñado y secciones naturales de inicio y entrega).</a:t>
             </a:r>
           </a:p>
           <a:p>
@@ -7474,7 +7474,21 @@
                 <a:latin typeface="Segoe UI Light" panose="020B0502040204020203" pitchFamily="34" charset="0"/>
                 <a:cs typeface="Segoe UI Light" panose="020B0502040204020203" pitchFamily="34" charset="0"/>
               </a:rPr>
-              <a:t>Modelo HEC-RAS con geometría importada desde ArcGIS usando HEC-GeoRAS, parámetros y condiciones de frontera.</a:t>
+              <a:t>Modelo HECRAS_v1 con geometría importada desde ArcGIS usando HEC-GeoRAS o desde RAS </a:t>
+            </a:r>
+            <a:r>
+              <a:rPr lang="es-CO" sz="1600" dirty="0" err="1">
+                <a:latin typeface="Segoe UI Light" panose="020B0502040204020203" pitchFamily="34" charset="0"/>
+                <a:cs typeface="Segoe UI Light" panose="020B0502040204020203" pitchFamily="34" charset="0"/>
+              </a:rPr>
+              <a:t>Mapper</a:t>
+            </a:r>
+            <a:r>
+              <a:rPr lang="es-CO" sz="1600" dirty="0">
+                <a:latin typeface="Segoe UI Light" panose="020B0502040204020203" pitchFamily="34" charset="0"/>
+                <a:cs typeface="Segoe UI Light" panose="020B0502040204020203" pitchFamily="34" charset="0"/>
+              </a:rPr>
+              <a:t>, parámetros y condiciones de frontera.</a:t>
             </a:r>
           </a:p>
           <a:p>
@@ -7520,7 +7534,7 @@
                 <a:latin typeface="Segoe UI Light" panose="020B0502040204020203" pitchFamily="34" charset="0"/>
                 <a:cs typeface="Segoe UI Light" panose="020B0502040204020203" pitchFamily="34" charset="0"/>
               </a:rPr>
-              <a:t>Modelo completo con condiciones de frontera para flujo permanente y no permanente.</a:t>
+              <a:t>Modelo hidráulico completo con condiciones de frontera para flujo permanente y no permanente.</a:t>
             </a:r>
           </a:p>
         </p:txBody>
@@ -7718,7 +7732,7 @@
                 <a:latin typeface="Segoe UI Light" panose="020B0502040204020203" pitchFamily="34" charset="0"/>
                 <a:cs typeface="Segoe UI Light" panose="020B0502040204020203" pitchFamily="34" charset="0"/>
               </a:rPr>
-              <a:t>En HEC-RAS, abra el proyecto HECRAS_v2.prj.</a:t>
+              <a:t>En HEC-RAS, abra el proyecto HECRAS_v1.prj.</a:t>
             </a:r>
           </a:p>
           <a:p>
@@ -8142,7 +8156,7 @@
                 <a:latin typeface="Segoe UI Light" panose="020B0502040204020203" pitchFamily="34" charset="0"/>
                 <a:cs typeface="Segoe UI Light" panose="020B0502040204020203" pitchFamily="34" charset="0"/>
               </a:rPr>
-              <a:t> File, seleccione la geometría HECRAS_v2 y en </a:t>
+              <a:t> File, seleccione la geometría HECRAS_v1 y en </a:t>
             </a:r>
             <a:r>
               <a:rPr lang="es-CO" sz="1600" dirty="0" err="1">
@@ -8156,7 +8170,7 @@
                 <a:latin typeface="Segoe UI Light" panose="020B0502040204020203" pitchFamily="34" charset="0"/>
                 <a:cs typeface="Segoe UI Light" panose="020B0502040204020203" pitchFamily="34" charset="0"/>
               </a:rPr>
-              <a:t> Flow File seleccione HECRAS_v2_Permanente.</a:t>
+              <a:t> Flow File seleccione HECRAS_v1_Permanente.</a:t>
             </a:r>
           </a:p>
           <a:p>
@@ -8189,7 +8203,7 @@
                 <a:latin typeface="Segoe UI Light" panose="020B0502040204020203" pitchFamily="34" charset="0"/>
                 <a:cs typeface="Segoe UI Light" panose="020B0502040204020203" pitchFamily="34" charset="0"/>
               </a:rPr>
-              <a:t>Guardar el análisis como HECRAS_v2_Permanente.</a:t>
+              <a:t>Guardar el análisis como HECRAS_v1_Permanente.</a:t>
             </a:r>
           </a:p>
         </p:txBody>
@@ -9060,21 +9074,7 @@
                 <a:latin typeface="Segoe UI Light" panose="020B0502040204020203" pitchFamily="34" charset="0"/>
                 <a:cs typeface="Segoe UI Light" panose="020B0502040204020203" pitchFamily="34" charset="0"/>
               </a:rPr>
-              <a:t>Para iniciar, seleccione la geometría HECRAS_v2, y los </a:t>
-            </a:r>
-            <a:r>
-              <a:rPr lang="es-CO" sz="1600" dirty="0" err="1">
-                <a:latin typeface="Segoe UI Light" panose="020B0502040204020203" pitchFamily="34" charset="0"/>
-                <a:cs typeface="Segoe UI Light" panose="020B0502040204020203" pitchFamily="34" charset="0"/>
-              </a:rPr>
-              <a:t>hidrogramas</a:t>
-            </a:r>
-            <a:r>
-              <a:rPr lang="es-CO" sz="1600" dirty="0">
-                <a:latin typeface="Segoe UI Light" panose="020B0502040204020203" pitchFamily="34" charset="0"/>
-                <a:cs typeface="Segoe UI Light" panose="020B0502040204020203" pitchFamily="34" charset="0"/>
-              </a:rPr>
-              <a:t> definidos para el periodo de retorno </a:t>
+              <a:t>Para iniciar, seleccione la geometría HECRAS_v1, y los hidrogramas definidos para el periodo de retorno </a:t>
             </a:r>
             <a:r>
               <a:rPr lang="es-CO" sz="1600" dirty="0" err="1">
@@ -9105,7 +9105,7 @@
                 <a:latin typeface="Segoe UI Light" panose="020B0502040204020203" pitchFamily="34" charset="0"/>
                 <a:cs typeface="Segoe UI Light" panose="020B0502040204020203" pitchFamily="34" charset="0"/>
               </a:rPr>
-              <a:t>Guarde el plan como HECRAS_v2_NP2.33</a:t>
+              <a:t>Guarde el plan como HECRAS_v1_NP2.33</a:t>
             </a:r>
           </a:p>
           <a:p>
